--- a/classes/parte-16-capstones-y-preparacion-de-certificaciones/302-preparacion-oscp-mentalidad-try-harder/clase-302-presentacion.pptx
+++ b/classes/parte-16-capstones-y-preparacion-de-certificaciones/302-preparacion-oscp-mentalidad-try-harder/clase-302-presentacion.pptx
@@ -17,6 +17,10 @@
     <p:sldId id="265" r:id="rId16"/>
     <p:sldId id="266" r:id="rId17"/>
     <p:sldId id="267" r:id="rId18"/>
+    <p:sldId id="268" r:id="rId19"/>
+    <p:sldId id="269" r:id="rId20"/>
+    <p:sldId id="270" r:id="rId21"/>
+    <p:sldId id="271" r:id="rId22"/>
   </p:sldIdLst>
   <p:sldSz cx="9144000" cy="6858000" type="screen4x3"/>
   <p:notesSz cx="6858000" cy="9144000"/>
@@ -3198,7 +3202,7 @@
                   <a:srgbClr val="0B3D2E"/>
                 </a:solidFill>
               </a:rPr>
-              <a:t>⚠️ Errores comunes</a:t>
+              <a:t>🧪 Laboratorio guiado</a:t>
             </a:r>
           </a:p>
         </p:txBody>
@@ -3236,67 +3240,97 @@
                   <a:srgbClr val="22282E"/>
                 </a:solidFill>
               </a:rPr>
-              <a:t>•  "Llevo 3 h en la misma máquina" — Rabbit hole; aplica tu regla de pivote y vuelve luego.</a:t>
-            </a:r>
-          </a:p>
-          <a:p>
-            <a:pPr>
-              <a:spcAft>
-                <a:spcPts val="600"/>
-              </a:spcAft>
-            </a:pPr>
-            <a:r>
-              <a:rPr sz="1500">
-                <a:solidFill>
-                  <a:srgbClr val="22282E"/>
-                </a:solidFill>
-              </a:rPr>
-              <a:t>•  "No encuentro vector" — Enumeración incompleta; re-escanea todos los puertos y servicios.</a:t>
-            </a:r>
-          </a:p>
-          <a:p>
-            <a:pPr>
-              <a:spcAft>
-                <a:spcPts val="600"/>
-              </a:spcAft>
-            </a:pPr>
-            <a:r>
-              <a:rPr sz="1500">
-                <a:solidFill>
-                  <a:srgbClr val="22282E"/>
-                </a:solidFill>
-              </a:rPr>
-              <a:t>•  "Perdí los comandos que usé" — Sin notas; nunca ejecutes sin registrar el paso.</a:t>
-            </a:r>
-          </a:p>
-          <a:p>
-            <a:pPr>
-              <a:spcAft>
-                <a:spcPts val="600"/>
-              </a:spcAft>
-            </a:pPr>
-            <a:r>
-              <a:rPr sz="1500">
-                <a:solidFill>
-                  <a:srgbClr val="22282E"/>
-                </a:solidFill>
-              </a:rPr>
-              <a:t>•  "Metasploit me bloqueó puntos" — Uso más allá de lo permitido; conoce las reglas del examen.</a:t>
-            </a:r>
-          </a:p>
-          <a:p>
-            <a:pPr>
-              <a:spcAft>
-                <a:spcPts val="600"/>
-              </a:spcAft>
-            </a:pPr>
-            <a:r>
-              <a:rPr sz="1500">
-                <a:solidFill>
-                  <a:srgbClr val="22282E"/>
-                </a:solidFill>
-              </a:rPr>
-              <a:t>•  "No me da el tiempo" — Falta de gestión; asigna presupuesto de horas por máquina.</a:t>
+              <a:t>•  Prepara la plantilla de notas. Crea en Obsidian un nodo por máquina con secciones: Recon, Servicios, Vulnerabilidades, Foothold, PrivEsc, Loot, Screenshots.</a:t>
+            </a:r>
+          </a:p>
+          <a:p>
+            <a:pPr>
+              <a:spcAft>
+                <a:spcPts val="600"/>
+              </a:spcAft>
+            </a:pPr>
+            <a:r>
+              <a:rPr sz="1500">
+                <a:solidFill>
+                  <a:srgbClr val="22282E"/>
+                </a:solidFill>
+              </a:rPr>
+              <a:t>•  Enumeración de puertos. Lanza un escaneo completo:</a:t>
+            </a:r>
+          </a:p>
+          <a:p>
+            <a:pPr>
+              <a:spcAft>
+                <a:spcPts val="600"/>
+              </a:spcAft>
+            </a:pPr>
+            <a:r>
+              <a:rPr sz="1500">
+                <a:solidFill>
+                  <a:srgbClr val="22282E"/>
+                </a:solidFill>
+              </a:rPr>
+              <a:t>•  Enumeración de servicios. Para HTTP: ffuf -u http://10.10.10.10/FUZZ -w /usr/share/wordlists/dirb/common.txt. Para SMB: enum4linux-ng 10.10.10.10.</a:t>
+            </a:r>
+          </a:p>
+          <a:p>
+            <a:pPr>
+              <a:spcAft>
+                <a:spcPts val="600"/>
+              </a:spcAft>
+            </a:pPr>
+            <a:r>
+              <a:rPr sz="1500">
+                <a:solidFill>
+                  <a:srgbClr val="22282E"/>
+                </a:solidFill>
+              </a:rPr>
+              <a:t>•  Identifica el vector. Cruza versiones con searchsploit y valida manualmente antes de lanzar nada.</a:t>
+            </a:r>
+          </a:p>
+          <a:p>
+            <a:pPr>
+              <a:spcAft>
+                <a:spcPts val="600"/>
+              </a:spcAft>
+            </a:pPr>
+            <a:r>
+              <a:rPr sz="1500">
+                <a:solidFill>
+                  <a:srgbClr val="22282E"/>
+                </a:solidFill>
+              </a:rPr>
+              <a:t>•  Consigue foothold. Obtén una shell de usuario; documenta el comando exacto y captura local.txt.</a:t>
+            </a:r>
+          </a:p>
+          <a:p>
+            <a:pPr>
+              <a:spcAft>
+                <a:spcPts val="600"/>
+              </a:spcAft>
+            </a:pPr>
+            <a:r>
+              <a:rPr sz="1500">
+                <a:solidFill>
+                  <a:srgbClr val="22282E"/>
+                </a:solidFill>
+              </a:rPr>
+              <a:t>•  Escala privilegios. Corre linpeas.sh/winPEAS.exe, analiza el output y busca el patrón (SUID, cron, token, servicio mal configurado). Captura proof.txt.</a:t>
+            </a:r>
+          </a:p>
+          <a:p>
+            <a:pPr>
+              <a:spcAft>
+                <a:spcPts val="600"/>
+              </a:spcAft>
+            </a:pPr>
+            <a:r>
+              <a:rPr sz="1500">
+                <a:solidFill>
+                  <a:srgbClr val="22282E"/>
+                </a:solidFill>
+              </a:rPr>
+              <a:t>•  Cronometra. Anota cuánto tardaste en cada fase; identifica dónde caíste en un rabbit hole.</a:t>
             </a:r>
           </a:p>
         </p:txBody>
@@ -3347,7 +3381,7 @@
                   <a:srgbClr val="0B3D2E"/>
                 </a:solidFill>
               </a:rPr>
-              <a:t>❓ Preguntas frecuentes</a:t>
+              <a:t>✍️ Ejercicios</a:t>
             </a:r>
           </a:p>
         </p:txBody>
@@ -3385,97 +3419,82 @@
                   <a:srgbClr val="22282E"/>
                 </a:solidFill>
               </a:rPr>
-              <a:t>•  ❓ ¿Cuántas máquinas necesito resolver antes del examen?</a:t>
-            </a:r>
-          </a:p>
-          <a:p>
-            <a:pPr>
-              <a:spcAft>
-                <a:spcPts val="600"/>
-              </a:spcAft>
-            </a:pPr>
-            <a:r>
-              <a:rPr sz="1500">
-                <a:solidFill>
-                  <a:srgbClr val="22282E"/>
-                </a:solidFill>
-              </a:rPr>
-              <a:t>•  No hay número mágico, pero listas como TJ Null (HTB/PG) sugieren 40–60 máquinas variadas para consolidar patrones.</a:t>
-            </a:r>
-          </a:p>
-          <a:p>
-            <a:pPr>
-              <a:spcAft>
-                <a:spcPts val="600"/>
-              </a:spcAft>
-            </a:pPr>
-            <a:r>
-              <a:rPr sz="1500">
-                <a:solidFill>
-                  <a:srgbClr val="22282E"/>
-                </a:solidFill>
-              </a:rPr>
-              <a:t>•  ❓ ¿Puedo usar Metasploit en el examen?</a:t>
-            </a:r>
-          </a:p>
-          <a:p>
-            <a:pPr>
-              <a:spcAft>
-                <a:spcPts val="600"/>
-              </a:spcAft>
-            </a:pPr>
-            <a:r>
-              <a:rPr sz="1500">
-                <a:solidFill>
-                  <a:srgbClr val="22282E"/>
-                </a:solidFill>
-              </a:rPr>
-              <a:t>•  Solo de forma limitada (una máquina) y con restricciones. Domina las técnicas manuales.</a:t>
-            </a:r>
-          </a:p>
-          <a:p>
-            <a:pPr>
-              <a:spcAft>
-                <a:spcPts val="600"/>
-              </a:spcAft>
-            </a:pPr>
-            <a:r>
-              <a:rPr sz="1500">
-                <a:solidFill>
-                  <a:srgbClr val="22282E"/>
-                </a:solidFill>
-              </a:rPr>
-              <a:t>•  ❓ ¿Cómo evito bloquearme mentalmente?</a:t>
-            </a:r>
-          </a:p>
-          <a:p>
-            <a:pPr>
-              <a:spcAft>
-                <a:spcPts val="600"/>
-              </a:spcAft>
-            </a:pPr>
-            <a:r>
-              <a:rPr sz="1500">
-                <a:solidFill>
-                  <a:srgbClr val="22282E"/>
-                </a:solidFill>
-              </a:rPr>
-              <a:t>•  Descansa, enumera de nuevo desde cero y verbaliza qué has probado. El bloqueo suele venir de asumir algo no verificado.</a:t>
-            </a:r>
-          </a:p>
-          <a:p>
-            <a:pPr>
-              <a:spcAft>
-                <a:spcPts val="600"/>
-              </a:spcAft>
-            </a:pPr>
-            <a:r>
-              <a:rPr sz="1500">
-                <a:solidFill>
-                  <a:srgbClr val="22282E"/>
-                </a:solidFill>
-              </a:rPr>
-              <a:t>•  ❓ ¿Qué app de notas conviene?</a:t>
+              <a:t>•  Redacta tu checklist de enumeración de una página (puertos → servicios → web → SMB → escalada).</a:t>
+            </a:r>
+          </a:p>
+          <a:p>
+            <a:pPr>
+              <a:spcAft>
+                <a:spcPts val="600"/>
+              </a:spcAft>
+            </a:pPr>
+            <a:r>
+              <a:rPr sz="1500">
+                <a:solidFill>
+                  <a:srgbClr val="22282E"/>
+                </a:solidFill>
+              </a:rPr>
+              <a:t>•  Resuelve tres máquinas fáciles documentándolas con la plantilla completa.</a:t>
+            </a:r>
+          </a:p>
+          <a:p>
+            <a:pPr>
+              <a:spcAft>
+                <a:spcPts val="600"/>
+              </a:spcAft>
+            </a:pPr>
+            <a:r>
+              <a:rPr sz="1500">
+                <a:solidFill>
+                  <a:srgbClr val="22282E"/>
+                </a:solidFill>
+              </a:rPr>
+              <a:t>•  Define tu regla de pivote: ¿cuántos minutos sin avance antes de cambiar de máquina?</a:t>
+            </a:r>
+          </a:p>
+          <a:p>
+            <a:pPr>
+              <a:spcAft>
+                <a:spcPts val="600"/>
+              </a:spcAft>
+            </a:pPr>
+            <a:r>
+              <a:rPr sz="1500">
+                <a:solidFill>
+                  <a:srgbClr val="22282E"/>
+                </a:solidFill>
+              </a:rPr>
+              <a:t>•  Practica una escalada Linux por SUID y una Windows por servicio inseguro.</a:t>
+            </a:r>
+          </a:p>
+          <a:p>
+            <a:pPr>
+              <a:spcAft>
+                <a:spcPts val="600"/>
+              </a:spcAft>
+            </a:pPr>
+            <a:r>
+              <a:rPr sz="1500">
+                <a:solidFill>
+                  <a:srgbClr val="22282E"/>
+                </a:solidFill>
+              </a:rPr>
+              <a:t>•  Cronometra una máquina de dificultad media y calcula tu ritmo de puntos/hora.</a:t>
+            </a:r>
+          </a:p>
+          <a:p>
+            <a:pPr>
+              <a:spcAft>
+                <a:spcPts val="600"/>
+              </a:spcAft>
+            </a:pPr>
+            <a:r>
+              <a:rPr sz="1500">
+                <a:solidFill>
+                  <a:srgbClr val="22282E"/>
+                </a:solidFill>
+              </a:rPr>
+              <a:t>•  Escribe un mini-writeup de una máquina como si fuera para el informe.</a:t>
             </a:r>
           </a:p>
         </p:txBody>
@@ -3526,7 +3545,7 @@
                   <a:srgbClr val="0B3D2E"/>
                 </a:solidFill>
               </a:rPr>
-              <a:t>🔗 Referencias</a:t>
+              <a:t>📝 Reto verificable</a:t>
             </a:r>
           </a:p>
         </p:txBody>
@@ -3564,6 +3583,438 @@
                   <a:srgbClr val="22282E"/>
                 </a:solidFill>
               </a:rPr>
+              <a:t>•  Resuelve cinco máquinas de una plataforma autorizada (mezcla Linux/Windows, dificultad creciente) y entrega un cuaderno de notas con enumeración, foothold, escalada y capturas de banderas para cada…</a:t>
+            </a:r>
+          </a:p>
+          <a:p>
+            <a:pPr>
+              <a:spcAft>
+                <a:spcPts val="600"/>
+              </a:spcAft>
+            </a:pPr>
+            <a:r>
+              <a:rPr sz="1500">
+                <a:solidFill>
+                  <a:srgbClr val="22282E"/>
+                </a:solidFill>
+              </a:rPr>
+              <a:t>•  Criterio de aceptación: las 5 máquinas tienen local.txt y proof.txt capturados, cada nota permite reconstruir el ataque sin volver a la máquina, y al menos una escalada es de Windows y otra de Linux.</a:t>
+            </a:r>
+          </a:p>
+        </p:txBody>
+      </p:sp>
+    </p:spTree>
+  </p:cSld>
+  <p:clrMapOvr>
+    <a:masterClrMapping/>
+  </p:clrMapOvr>
+</p:sld>
+</file>
+
+<file path=ppt/slides/slide13.xml><?xml version="1.0" encoding="utf-8"?>
+<p:sld xmlns:a="http://schemas.openxmlformats.org/drawingml/2006/main" xmlns:p="http://schemas.openxmlformats.org/presentationml/2006/main" xmlns:r="http://schemas.openxmlformats.org/officeDocument/2006/relationships">
+  <p:cSld>
+    <p:spTree>
+      <p:nvGrpSpPr>
+        <p:cNvPr id="1" name=""/>
+        <p:cNvGrpSpPr/>
+        <p:nvPr/>
+      </p:nvGrpSpPr>
+      <p:grpSpPr/>
+      <p:sp>
+        <p:nvSpPr>
+          <p:cNvPr id="2" name="TextBox 1"/>
+          <p:cNvSpPr txBox="1"/>
+          <p:nvPr/>
+        </p:nvSpPr>
+        <p:spPr>
+          <a:xfrm>
+            <a:off x="457200" y="320040"/>
+            <a:ext cx="8229600" cy="822960"/>
+          </a:xfrm>
+          <a:prstGeom prst="rect">
+            <a:avLst/>
+          </a:prstGeom>
+          <a:noFill/>
+        </p:spPr>
+        <p:txBody>
+          <a:bodyPr wrap="square">
+            <a:spAutoFit/>
+          </a:bodyPr>
+          <a:lstStyle/>
+          <a:p>
+            <a:r>
+              <a:rPr sz="2600" b="1">
+                <a:solidFill>
+                  <a:srgbClr val="0B3D2E"/>
+                </a:solidFill>
+              </a:rPr>
+              <a:t>⚠️ Errores comunes</a:t>
+            </a:r>
+          </a:p>
+        </p:txBody>
+      </p:sp>
+      <p:sp>
+        <p:nvSpPr>
+          <p:cNvPr id="3" name="TextBox 2"/>
+          <p:cNvSpPr txBox="1"/>
+          <p:nvPr/>
+        </p:nvSpPr>
+        <p:spPr>
+          <a:xfrm>
+            <a:off x="457200" y="1280160"/>
+            <a:ext cx="8229600" cy="4937760"/>
+          </a:xfrm>
+          <a:prstGeom prst="rect">
+            <a:avLst/>
+          </a:prstGeom>
+          <a:noFill/>
+        </p:spPr>
+        <p:txBody>
+          <a:bodyPr wrap="square">
+            <a:spAutoFit/>
+          </a:bodyPr>
+          <a:lstStyle/>
+          <a:p>
+            <a:pPr>
+              <a:spcAft>
+                <a:spcPts val="600"/>
+              </a:spcAft>
+            </a:pPr>
+            <a:r>
+              <a:rPr sz="1500">
+                <a:solidFill>
+                  <a:srgbClr val="22282E"/>
+                </a:solidFill>
+              </a:rPr>
+              <a:t>•  "Llevo 3 h en la misma máquina" — Rabbit hole; aplica tu regla de pivote y vuelve luego.</a:t>
+            </a:r>
+          </a:p>
+          <a:p>
+            <a:pPr>
+              <a:spcAft>
+                <a:spcPts val="600"/>
+              </a:spcAft>
+            </a:pPr>
+            <a:r>
+              <a:rPr sz="1500">
+                <a:solidFill>
+                  <a:srgbClr val="22282E"/>
+                </a:solidFill>
+              </a:rPr>
+              <a:t>•  "No encuentro vector" — Enumeración incompleta; re-escanea todos los puertos y servicios.</a:t>
+            </a:r>
+          </a:p>
+          <a:p>
+            <a:pPr>
+              <a:spcAft>
+                <a:spcPts val="600"/>
+              </a:spcAft>
+            </a:pPr>
+            <a:r>
+              <a:rPr sz="1500">
+                <a:solidFill>
+                  <a:srgbClr val="22282E"/>
+                </a:solidFill>
+              </a:rPr>
+              <a:t>•  "Perdí los comandos que usé" — Sin notas; nunca ejecutes sin registrar el paso.</a:t>
+            </a:r>
+          </a:p>
+          <a:p>
+            <a:pPr>
+              <a:spcAft>
+                <a:spcPts val="600"/>
+              </a:spcAft>
+            </a:pPr>
+            <a:r>
+              <a:rPr sz="1500">
+                <a:solidFill>
+                  <a:srgbClr val="22282E"/>
+                </a:solidFill>
+              </a:rPr>
+              <a:t>•  "Metasploit me bloqueó puntos" — Uso más allá de lo permitido; conoce las reglas del examen.</a:t>
+            </a:r>
+          </a:p>
+          <a:p>
+            <a:pPr>
+              <a:spcAft>
+                <a:spcPts val="600"/>
+              </a:spcAft>
+            </a:pPr>
+            <a:r>
+              <a:rPr sz="1500">
+                <a:solidFill>
+                  <a:srgbClr val="22282E"/>
+                </a:solidFill>
+              </a:rPr>
+              <a:t>•  "No me da el tiempo" — Falta de gestión; asigna presupuesto de horas por máquina.</a:t>
+            </a:r>
+          </a:p>
+        </p:txBody>
+      </p:sp>
+    </p:spTree>
+  </p:cSld>
+  <p:clrMapOvr>
+    <a:masterClrMapping/>
+  </p:clrMapOvr>
+</p:sld>
+</file>
+
+<file path=ppt/slides/slide14.xml><?xml version="1.0" encoding="utf-8"?>
+<p:sld xmlns:a="http://schemas.openxmlformats.org/drawingml/2006/main" xmlns:p="http://schemas.openxmlformats.org/presentationml/2006/main" xmlns:r="http://schemas.openxmlformats.org/officeDocument/2006/relationships">
+  <p:cSld>
+    <p:spTree>
+      <p:nvGrpSpPr>
+        <p:cNvPr id="1" name=""/>
+        <p:cNvGrpSpPr/>
+        <p:nvPr/>
+      </p:nvGrpSpPr>
+      <p:grpSpPr/>
+      <p:sp>
+        <p:nvSpPr>
+          <p:cNvPr id="2" name="TextBox 1"/>
+          <p:cNvSpPr txBox="1"/>
+          <p:nvPr/>
+        </p:nvSpPr>
+        <p:spPr>
+          <a:xfrm>
+            <a:off x="457200" y="320040"/>
+            <a:ext cx="8229600" cy="822960"/>
+          </a:xfrm>
+          <a:prstGeom prst="rect">
+            <a:avLst/>
+          </a:prstGeom>
+          <a:noFill/>
+        </p:spPr>
+        <p:txBody>
+          <a:bodyPr wrap="square">
+            <a:spAutoFit/>
+          </a:bodyPr>
+          <a:lstStyle/>
+          <a:p>
+            <a:r>
+              <a:rPr sz="2600" b="1">
+                <a:solidFill>
+                  <a:srgbClr val="0B3D2E"/>
+                </a:solidFill>
+              </a:rPr>
+              <a:t>❓ Preguntas frecuentes</a:t>
+            </a:r>
+          </a:p>
+        </p:txBody>
+      </p:sp>
+      <p:sp>
+        <p:nvSpPr>
+          <p:cNvPr id="3" name="TextBox 2"/>
+          <p:cNvSpPr txBox="1"/>
+          <p:nvPr/>
+        </p:nvSpPr>
+        <p:spPr>
+          <a:xfrm>
+            <a:off x="457200" y="1280160"/>
+            <a:ext cx="8229600" cy="4937760"/>
+          </a:xfrm>
+          <a:prstGeom prst="rect">
+            <a:avLst/>
+          </a:prstGeom>
+          <a:noFill/>
+        </p:spPr>
+        <p:txBody>
+          <a:bodyPr wrap="square">
+            <a:spAutoFit/>
+          </a:bodyPr>
+          <a:lstStyle/>
+          <a:p>
+            <a:pPr>
+              <a:spcAft>
+                <a:spcPts val="600"/>
+              </a:spcAft>
+            </a:pPr>
+            <a:r>
+              <a:rPr sz="1500">
+                <a:solidFill>
+                  <a:srgbClr val="22282E"/>
+                </a:solidFill>
+              </a:rPr>
+              <a:t>•  ❓ ¿Cuántas máquinas necesito resolver antes del examen?</a:t>
+            </a:r>
+          </a:p>
+          <a:p>
+            <a:pPr>
+              <a:spcAft>
+                <a:spcPts val="600"/>
+              </a:spcAft>
+            </a:pPr>
+            <a:r>
+              <a:rPr sz="1500">
+                <a:solidFill>
+                  <a:srgbClr val="22282E"/>
+                </a:solidFill>
+              </a:rPr>
+              <a:t>•  No hay número mágico, pero listas como TJ Null (HTB/PG) sugieren 40–60 máquinas variadas para consolidar patrones.</a:t>
+            </a:r>
+          </a:p>
+          <a:p>
+            <a:pPr>
+              <a:spcAft>
+                <a:spcPts val="600"/>
+              </a:spcAft>
+            </a:pPr>
+            <a:r>
+              <a:rPr sz="1500">
+                <a:solidFill>
+                  <a:srgbClr val="22282E"/>
+                </a:solidFill>
+              </a:rPr>
+              <a:t>•  ❓ ¿Puedo usar Metasploit en el examen?</a:t>
+            </a:r>
+          </a:p>
+          <a:p>
+            <a:pPr>
+              <a:spcAft>
+                <a:spcPts val="600"/>
+              </a:spcAft>
+            </a:pPr>
+            <a:r>
+              <a:rPr sz="1500">
+                <a:solidFill>
+                  <a:srgbClr val="22282E"/>
+                </a:solidFill>
+              </a:rPr>
+              <a:t>•  Solo de forma limitada (una máquina) y con restricciones. Domina las técnicas manuales.</a:t>
+            </a:r>
+          </a:p>
+          <a:p>
+            <a:pPr>
+              <a:spcAft>
+                <a:spcPts val="600"/>
+              </a:spcAft>
+            </a:pPr>
+            <a:r>
+              <a:rPr sz="1500">
+                <a:solidFill>
+                  <a:srgbClr val="22282E"/>
+                </a:solidFill>
+              </a:rPr>
+              <a:t>•  ❓ ¿Cómo evito bloquearme mentalmente?</a:t>
+            </a:r>
+          </a:p>
+          <a:p>
+            <a:pPr>
+              <a:spcAft>
+                <a:spcPts val="600"/>
+              </a:spcAft>
+            </a:pPr>
+            <a:r>
+              <a:rPr sz="1500">
+                <a:solidFill>
+                  <a:srgbClr val="22282E"/>
+                </a:solidFill>
+              </a:rPr>
+              <a:t>•  Descansa, enumera de nuevo desde cero y verbaliza qué has probado. El bloqueo suele venir de asumir algo no verificado.</a:t>
+            </a:r>
+          </a:p>
+          <a:p>
+            <a:pPr>
+              <a:spcAft>
+                <a:spcPts val="600"/>
+              </a:spcAft>
+            </a:pPr>
+            <a:r>
+              <a:rPr sz="1500">
+                <a:solidFill>
+                  <a:srgbClr val="22282E"/>
+                </a:solidFill>
+              </a:rPr>
+              <a:t>•  ❓ ¿Qué app de notas conviene?</a:t>
+            </a:r>
+          </a:p>
+        </p:txBody>
+      </p:sp>
+    </p:spTree>
+  </p:cSld>
+  <p:clrMapOvr>
+    <a:masterClrMapping/>
+  </p:clrMapOvr>
+</p:sld>
+</file>
+
+<file path=ppt/slides/slide15.xml><?xml version="1.0" encoding="utf-8"?>
+<p:sld xmlns:a="http://schemas.openxmlformats.org/drawingml/2006/main" xmlns:p="http://schemas.openxmlformats.org/presentationml/2006/main" xmlns:r="http://schemas.openxmlformats.org/officeDocument/2006/relationships">
+  <p:cSld>
+    <p:spTree>
+      <p:nvGrpSpPr>
+        <p:cNvPr id="1" name=""/>
+        <p:cNvGrpSpPr/>
+        <p:nvPr/>
+      </p:nvGrpSpPr>
+      <p:grpSpPr/>
+      <p:sp>
+        <p:nvSpPr>
+          <p:cNvPr id="2" name="TextBox 1"/>
+          <p:cNvSpPr txBox="1"/>
+          <p:nvPr/>
+        </p:nvSpPr>
+        <p:spPr>
+          <a:xfrm>
+            <a:off x="457200" y="320040"/>
+            <a:ext cx="8229600" cy="822960"/>
+          </a:xfrm>
+          <a:prstGeom prst="rect">
+            <a:avLst/>
+          </a:prstGeom>
+          <a:noFill/>
+        </p:spPr>
+        <p:txBody>
+          <a:bodyPr wrap="square">
+            <a:spAutoFit/>
+          </a:bodyPr>
+          <a:lstStyle/>
+          <a:p>
+            <a:r>
+              <a:rPr sz="2600" b="1">
+                <a:solidFill>
+                  <a:srgbClr val="0B3D2E"/>
+                </a:solidFill>
+              </a:rPr>
+              <a:t>🔗 Referencias</a:t>
+            </a:r>
+          </a:p>
+        </p:txBody>
+      </p:sp>
+      <p:sp>
+        <p:nvSpPr>
+          <p:cNvPr id="3" name="TextBox 2"/>
+          <p:cNvSpPr txBox="1"/>
+          <p:nvPr/>
+        </p:nvSpPr>
+        <p:spPr>
+          <a:xfrm>
+            <a:off x="457200" y="1280160"/>
+            <a:ext cx="8229600" cy="4937760"/>
+          </a:xfrm>
+          <a:prstGeom prst="rect">
+            <a:avLst/>
+          </a:prstGeom>
+          <a:noFill/>
+        </p:spPr>
+        <p:txBody>
+          <a:bodyPr wrap="square">
+            <a:spAutoFit/>
+          </a:bodyPr>
+          <a:lstStyle/>
+          <a:p>
+            <a:pPr>
+              <a:spcAft>
+                <a:spcPts val="600"/>
+              </a:spcAft>
+            </a:pPr>
+            <a:r>
+              <a:rPr sz="1500">
+                <a:solidFill>
+                  <a:srgbClr val="22282E"/>
+                </a:solidFill>
+              </a:rPr>
               <a:t>•  Offensive Security PEN-200: &lt;https://www.offsec.com/courses/pen-200/&gt;</a:t>
             </a:r>
           </a:p>
@@ -3629,6 +4080,81 @@
           </a:p>
         </p:txBody>
       </p:sp>
+    </p:spTree>
+  </p:cSld>
+  <p:clrMapOvr>
+    <a:masterClrMapping/>
+  </p:clrMapOvr>
+</p:sld>
+</file>
+
+<file path=ppt/slides/slide16.xml><?xml version="1.0" encoding="utf-8"?>
+<p:sld xmlns:a="http://schemas.openxmlformats.org/drawingml/2006/main" xmlns:p="http://schemas.openxmlformats.org/presentationml/2006/main" xmlns:r="http://schemas.openxmlformats.org/officeDocument/2006/relationships">
+  <p:cSld>
+    <p:spTree>
+      <p:nvGrpSpPr>
+        <p:cNvPr id="1" name=""/>
+        <p:cNvGrpSpPr/>
+        <p:nvPr/>
+      </p:nvGrpSpPr>
+      <p:grpSpPr/>
+      <p:sp>
+        <p:nvSpPr>
+          <p:cNvPr id="2" name="TextBox 1"/>
+          <p:cNvSpPr txBox="1"/>
+          <p:nvPr/>
+        </p:nvSpPr>
+        <p:spPr>
+          <a:xfrm>
+            <a:off x="457200" y="274320"/>
+            <a:ext cx="8229600" cy="640080"/>
+          </a:xfrm>
+          <a:prstGeom prst="rect">
+            <a:avLst/>
+          </a:prstGeom>
+          <a:noFill/>
+        </p:spPr>
+        <p:txBody>
+          <a:bodyPr wrap="square">
+            <a:spAutoFit/>
+          </a:bodyPr>
+          <a:lstStyle/>
+          <a:p>
+            <a:r>
+              <a:rPr sz="2200" b="1">
+                <a:solidFill>
+                  <a:srgbClr val="0B3D2E"/>
+                </a:solidFill>
+              </a:rPr>
+              <a:t>Diagrama de la clase</a:t>
+            </a:r>
+          </a:p>
+        </p:txBody>
+      </p:sp>
+      <p:pic>
+        <p:nvPicPr>
+          <p:cNvPr id="3" name="Picture 2" descr="fb0873888bfd8d6f.png"/>
+          <p:cNvPicPr>
+            <a:picLocks noChangeAspect="1"/>
+          </p:cNvPicPr>
+          <p:nvPr/>
+        </p:nvPicPr>
+        <p:blipFill>
+          <a:blip r:embed="rId2"/>
+          <a:stretch>
+            <a:fillRect/>
+          </a:stretch>
+        </p:blipFill>
+        <p:spPr>
+          <a:xfrm>
+            <a:off x="457200" y="3334003"/>
+            <a:ext cx="8229600" cy="830074"/>
+          </a:xfrm>
+          <a:prstGeom prst="rect">
+            <a:avLst/>
+          </a:prstGeom>
+        </p:spPr>
+      </p:pic>
     </p:spTree>
   </p:cSld>
   <p:clrMapOvr>
@@ -3713,7 +4239,7 @@
                   <a:srgbClr val="22282E"/>
                 </a:solidFill>
               </a:rPr>
-              <a:t>•  Que el alumno interiorice la metodología y la mentalidad que exige el OSCP: enumeración exhaustiva, toma de notas disciplinada, gestión del tiempo bajo presión y persistencia ("Try Harder") sin caer en la frustración improductiva. No se trata de memorizar exploits, sino de tener un proceso repetible que funcione contra máquinas desconocidas.</a:t>
+              <a:t>•  Que el alumno interiorice la metodología y la mentalidad que exige el OSCP: enumeración exhaustiva, toma de notas disciplinada, gestión del tiempo bajo presión y persistencia ("Try Harder") sin caer…</a:t>
             </a:r>
           </a:p>
         </p:txBody>
@@ -4107,7 +4633,7 @@
                   <a:srgbClr val="0B3D2E"/>
                 </a:solidFill>
               </a:rPr>
-              <a:t>📖 Definiciones y características</a:t>
+              <a:t>🧠 Explicación en profundidad</a:t>
             </a:r>
           </a:p>
         </p:txBody>
@@ -4145,82 +4671,22 @@
                   <a:srgbClr val="22282E"/>
                 </a:solidFill>
               </a:rPr>
-              <a:t>•  Try Harder: lema de OffSec que promueve la resolución autónoma. Característica: persistir con método, no repetir lo mismo esperando otro resultado.</a:t>
-            </a:r>
-          </a:p>
-          <a:p>
-            <a:pPr>
-              <a:spcAft>
-                <a:spcPts val="600"/>
-              </a:spcAft>
-            </a:pPr>
-            <a:r>
-              <a:rPr sz="1500">
-                <a:solidFill>
-                  <a:srgbClr val="22282E"/>
-                </a:solidFill>
-              </a:rPr>
-              <a:t>•  Rabbit hole: pista falsa que consume horas sin resultado. Característica: reconocerlo pronto y pivotar.</a:t>
-            </a:r>
-          </a:p>
-          <a:p>
-            <a:pPr>
-              <a:spcAft>
-                <a:spcPts val="600"/>
-              </a:spcAft>
-            </a:pPr>
-            <a:r>
-              <a:rPr sz="1500">
-                <a:solidFill>
-                  <a:srgbClr val="22282E"/>
-                </a:solidFill>
-              </a:rPr>
-              <a:t>•  Low-hanging fruit: vulnerabilidad fácil que da puntos rápidos. Característica: se caza con buena enumeración inicial.</a:t>
-            </a:r>
-          </a:p>
-          <a:p>
-            <a:pPr>
-              <a:spcAft>
-                <a:spcPts val="600"/>
-              </a:spcAft>
-            </a:pPr>
-            <a:r>
-              <a:rPr sz="1500">
-                <a:solidFill>
-                  <a:srgbClr val="22282E"/>
-                </a:solidFill>
-              </a:rPr>
-              <a:t>•  Foothold: primer acceso a la máquina (usuario sin privilegios). Característica: paso previo a la escalada.</a:t>
-            </a:r>
-          </a:p>
-          <a:p>
-            <a:pPr>
-              <a:spcAft>
-                <a:spcPts val="600"/>
-              </a:spcAft>
-            </a:pPr>
-            <a:r>
-              <a:rPr sz="1500">
-                <a:solidFill>
-                  <a:srgbClr val="22282E"/>
-                </a:solidFill>
-              </a:rPr>
-              <a:t>•  Privilege escalation: pasar de usuario a root/SYSTEM. Característica: se apoya en enumeración local (kernel, SUID, servicios, tokens).</a:t>
-            </a:r>
-          </a:p>
-          <a:p>
-            <a:pPr>
-              <a:spcAft>
-                <a:spcPts val="600"/>
-              </a:spcAft>
-            </a:pPr>
-            <a:r>
-              <a:rPr sz="1500">
-                <a:solidFill>
-                  <a:srgbClr val="22282E"/>
-                </a:solidFill>
-              </a:rPr>
-              <a:t>•  Proof.txt / local.txt: banderas que prueban el compromiso. Característica: son la evidencia puntuable del examen.</a:t>
+              <a:t>•  La persistencia profesional es iterar con hipótesis, notas y límites; no repetir comandos ni ignorar seguridad. La clase convierte el objetivo en una evidencia evaluable, declara supuestos y reserva…</a:t>
+            </a:r>
+          </a:p>
+          <a:p>
+            <a:pPr>
+              <a:spcAft>
+                <a:spcPts val="600"/>
+              </a:spcAft>
+            </a:pPr>
+            <a:r>
+              <a:rPr sz="1500">
+                <a:solidFill>
+                  <a:srgbClr val="22282E"/>
+                </a:solidFill>
+              </a:rPr>
+              <a:t>•  Tras horas sin progreso, el alumno vuelve al inventario, identifica un servicio omitido y documenta el cambio de hipótesis.</a:t>
             </a:r>
           </a:p>
         </p:txBody>
@@ -4271,7 +4737,7 @@
                   <a:srgbClr val="0B3D2E"/>
                 </a:solidFill>
               </a:rPr>
-              <a:t>🧰 Herramientas y preparación</a:t>
+              <a:t>📔 Glosario operativo</a:t>
             </a:r>
           </a:p>
         </p:txBody>
@@ -4309,82 +4775,52 @@
                   <a:srgbClr val="22282E"/>
                 </a:solidFill>
               </a:rPr>
-              <a:t>•  Kali Linux actualizado (tu VM de la Clase 010 / equivalente).</a:t>
-            </a:r>
-          </a:p>
-          <a:p>
-            <a:pPr>
-              <a:spcAft>
-                <a:spcPts val="600"/>
-              </a:spcAft>
-            </a:pPr>
-            <a:r>
-              <a:rPr sz="1500">
-                <a:solidFill>
-                  <a:srgbClr val="22282E"/>
-                </a:solidFill>
-              </a:rPr>
-              <a:t>•  Enumeración: nmap, autorecon, ffuf/gobuster, enum4linux-ng, nikto.</a:t>
-            </a:r>
-          </a:p>
-          <a:p>
-            <a:pPr>
-              <a:spcAft>
-                <a:spcPts val="600"/>
-              </a:spcAft>
-            </a:pPr>
-            <a:r>
-              <a:rPr sz="1500">
-                <a:solidFill>
-                  <a:srgbClr val="22282E"/>
-                </a:solidFill>
-              </a:rPr>
-              <a:t>•  Escalada: linpeas.sh, winPEAS.exe, pspy, GTFOBins, LOLBAS.</a:t>
-            </a:r>
-          </a:p>
-          <a:p>
-            <a:pPr>
-              <a:spcAft>
-                <a:spcPts val="600"/>
-              </a:spcAft>
-            </a:pPr>
-            <a:r>
-              <a:rPr sz="1500">
-                <a:solidFill>
-                  <a:srgbClr val="22282E"/>
-                </a:solidFill>
-              </a:rPr>
-              <a:t>•  Notas: CherryTree u Obsidian con plantilla por máquina (puertos, servicios, creds, PoC, escalada).</a:t>
-            </a:r>
-          </a:p>
-          <a:p>
-            <a:pPr>
-              <a:spcAft>
-                <a:spcPts val="600"/>
-              </a:spcAft>
-            </a:pPr>
-            <a:r>
-              <a:rPr sz="1500">
-                <a:solidFill>
-                  <a:srgbClr val="22282E"/>
-                </a:solidFill>
-              </a:rPr>
-              <a:t>•  Plataformas de práctica autorizadas: HTB, Proving Grounds Play/Practice, TryHackMe.</a:t>
-            </a:r>
-          </a:p>
-          <a:p>
-            <a:pPr>
-              <a:spcAft>
-                <a:spcPts val="600"/>
-              </a:spcAft>
-            </a:pPr>
-            <a:r>
-              <a:rPr sz="1500">
-                <a:solidFill>
-                  <a:srgbClr val="22282E"/>
-                </a:solidFill>
-              </a:rPr>
-              <a:t>•  Plantilla de informe (la reutilizarás en la Clase 303).</a:t>
+              <a:t>•  Término — Definición</a:t>
+            </a:r>
+          </a:p>
+          <a:p>
+            <a:pPr>
+              <a:spcAft>
+                <a:spcPts val="600"/>
+              </a:spcAft>
+            </a:pPr>
+            <a:r>
+              <a:rPr sz="1500">
+                <a:solidFill>
+                  <a:srgbClr val="22282E"/>
+                </a:solidFill>
+              </a:rPr>
+              <a:t>•  Enumeración — Construcción sistemática de superficie y evidencia.</a:t>
+            </a:r>
+          </a:p>
+          <a:p>
+            <a:pPr>
+              <a:spcAft>
+                <a:spcPts val="600"/>
+              </a:spcAft>
+            </a:pPr>
+            <a:r>
+              <a:rPr sz="1500">
+                <a:solidFill>
+                  <a:srgbClr val="22282E"/>
+                </a:solidFill>
+              </a:rPr>
+              <a:t>•  Evidencia — Resultado que otra persona puede revisar y relacionar con un criterio.</a:t>
+            </a:r>
+          </a:p>
+          <a:p>
+            <a:pPr>
+              <a:spcAft>
+                <a:spcPts val="600"/>
+              </a:spcAft>
+            </a:pPr>
+            <a:r>
+              <a:rPr sz="1500">
+                <a:solidFill>
+                  <a:srgbClr val="22282E"/>
+                </a:solidFill>
+              </a:rPr>
+              <a:t>•  Retrospectiva — Revisión de decisiones, límites y siguiente mejora.</a:t>
             </a:r>
           </a:p>
         </p:txBody>
@@ -4435,7 +4871,7 @@
                   <a:srgbClr val="0B3D2E"/>
                 </a:solidFill>
               </a:rPr>
-              <a:t>🧪 Laboratorio guiado</a:t>
+              <a:t>✅ Criterio de dominio</a:t>
             </a:r>
           </a:p>
         </p:txBody>
@@ -4473,97 +4909,7 @@
                   <a:srgbClr val="22282E"/>
                 </a:solidFill>
               </a:rPr>
-              <a:t>•  Prepara la plantilla de notas. Crea en Obsidian un nodo por máquina con secciones: Recon, Servicios, Vulnerabilidades, Foothold, PrivEsc, Loot, Screenshots.</a:t>
-            </a:r>
-          </a:p>
-          <a:p>
-            <a:pPr>
-              <a:spcAft>
-                <a:spcPts val="600"/>
-              </a:spcAft>
-            </a:pPr>
-            <a:r>
-              <a:rPr sz="1500">
-                <a:solidFill>
-                  <a:srgbClr val="22282E"/>
-                </a:solidFill>
-              </a:rPr>
-              <a:t>•  Enumeración de puertos. Lanza un escaneo completo:</a:t>
-            </a:r>
-          </a:p>
-          <a:p>
-            <a:pPr>
-              <a:spcAft>
-                <a:spcPts val="600"/>
-              </a:spcAft>
-            </a:pPr>
-            <a:r>
-              <a:rPr sz="1500">
-                <a:solidFill>
-                  <a:srgbClr val="22282E"/>
-                </a:solidFill>
-              </a:rPr>
-              <a:t>•  nmap -p- --min-rate 2000 -oN nmap-full.txt 10.10.10.10</a:t>
-            </a:r>
-          </a:p>
-          <a:p>
-            <a:pPr>
-              <a:spcAft>
-                <a:spcPts val="600"/>
-              </a:spcAft>
-            </a:pPr>
-            <a:r>
-              <a:rPr sz="1500">
-                <a:solidFill>
-                  <a:srgbClr val="22282E"/>
-                </a:solidFill>
-              </a:rPr>
-              <a:t>•  nmap -p 22,80,445 -sVC -oN nmap-serv.txt 10.10.10.10</a:t>
-            </a:r>
-          </a:p>
-          <a:p>
-            <a:pPr>
-              <a:spcAft>
-                <a:spcPts val="600"/>
-              </a:spcAft>
-            </a:pPr>
-            <a:r>
-              <a:rPr sz="1500">
-                <a:solidFill>
-                  <a:srgbClr val="22282E"/>
-                </a:solidFill>
-              </a:rPr>
-              <a:t>•  Enumeración de servicios. Para HTTP: ffuf -u http://10.10.10.10/FUZZ -w /usr/share/wordlists/dirb/common.txt. Para SMB: enum4linux-ng 10.10.10.10.</a:t>
-            </a:r>
-          </a:p>
-          <a:p>
-            <a:pPr>
-              <a:spcAft>
-                <a:spcPts val="600"/>
-              </a:spcAft>
-            </a:pPr>
-            <a:r>
-              <a:rPr sz="1500">
-                <a:solidFill>
-                  <a:srgbClr val="22282E"/>
-                </a:solidFill>
-              </a:rPr>
-              <a:t>•  Identifica el vector. Cruza versiones con searchsploit y valida manualmente antes de lanzar nada.</a:t>
-            </a:r>
-          </a:p>
-          <a:p>
-            <a:pPr>
-              <a:spcAft>
-                <a:spcPts val="600"/>
-              </a:spcAft>
-            </a:pPr>
-            <a:r>
-              <a:rPr sz="1500">
-                <a:solidFill>
-                  <a:srgbClr val="22282E"/>
-                </a:solidFill>
-              </a:rPr>
-              <a:t>•  Consigue foothold. Obtén una shell de usuario; documenta el comando exacto y captura local.txt.</a:t>
+              <a:t>•  El alumno domina la clase cuando planifica, ejecuta y comunica una evidencia completa, respeta alcance y puede defender sus decisiones ante una revisión.</a:t>
             </a:r>
           </a:p>
         </p:txBody>
@@ -4614,7 +4960,7 @@
                   <a:srgbClr val="0B3D2E"/>
                 </a:solidFill>
               </a:rPr>
-              <a:t>✍️ Ejercicios</a:t>
+              <a:t>📖 Definiciones y características</a:t>
             </a:r>
           </a:p>
         </p:txBody>
@@ -4652,82 +4998,82 @@
                   <a:srgbClr val="22282E"/>
                 </a:solidFill>
               </a:rPr>
-              <a:t>•  Redacta tu checklist de enumeración de una página (puertos → servicios → web → SMB → escalada).</a:t>
-            </a:r>
-          </a:p>
-          <a:p>
-            <a:pPr>
-              <a:spcAft>
-                <a:spcPts val="600"/>
-              </a:spcAft>
-            </a:pPr>
-            <a:r>
-              <a:rPr sz="1500">
-                <a:solidFill>
-                  <a:srgbClr val="22282E"/>
-                </a:solidFill>
-              </a:rPr>
-              <a:t>•  Resuelve tres máquinas fáciles documentándolas con la plantilla completa.</a:t>
-            </a:r>
-          </a:p>
-          <a:p>
-            <a:pPr>
-              <a:spcAft>
-                <a:spcPts val="600"/>
-              </a:spcAft>
-            </a:pPr>
-            <a:r>
-              <a:rPr sz="1500">
-                <a:solidFill>
-                  <a:srgbClr val="22282E"/>
-                </a:solidFill>
-              </a:rPr>
-              <a:t>•  Define tu regla de pivote: ¿cuántos minutos sin avance antes de cambiar de máquina?</a:t>
-            </a:r>
-          </a:p>
-          <a:p>
-            <a:pPr>
-              <a:spcAft>
-                <a:spcPts val="600"/>
-              </a:spcAft>
-            </a:pPr>
-            <a:r>
-              <a:rPr sz="1500">
-                <a:solidFill>
-                  <a:srgbClr val="22282E"/>
-                </a:solidFill>
-              </a:rPr>
-              <a:t>•  Practica una escalada Linux por SUID y una Windows por servicio inseguro.</a:t>
-            </a:r>
-          </a:p>
-          <a:p>
-            <a:pPr>
-              <a:spcAft>
-                <a:spcPts val="600"/>
-              </a:spcAft>
-            </a:pPr>
-            <a:r>
-              <a:rPr sz="1500">
-                <a:solidFill>
-                  <a:srgbClr val="22282E"/>
-                </a:solidFill>
-              </a:rPr>
-              <a:t>•  Cronometra una máquina de dificultad media y calcula tu ritmo de puntos/hora.</a:t>
-            </a:r>
-          </a:p>
-          <a:p>
-            <a:pPr>
-              <a:spcAft>
-                <a:spcPts val="600"/>
-              </a:spcAft>
-            </a:pPr>
-            <a:r>
-              <a:rPr sz="1500">
-                <a:solidFill>
-                  <a:srgbClr val="22282E"/>
-                </a:solidFill>
-              </a:rPr>
-              <a:t>•  Escribe un mini-writeup de una máquina como si fuera para el informe.</a:t>
+              <a:t>•  Try Harder: lema de OffSec que promueve la resolución autónoma. Característica: persistir con método, no repetir lo mismo esperando otro resultado.</a:t>
+            </a:r>
+          </a:p>
+          <a:p>
+            <a:pPr>
+              <a:spcAft>
+                <a:spcPts val="600"/>
+              </a:spcAft>
+            </a:pPr>
+            <a:r>
+              <a:rPr sz="1500">
+                <a:solidFill>
+                  <a:srgbClr val="22282E"/>
+                </a:solidFill>
+              </a:rPr>
+              <a:t>•  Rabbit hole: pista falsa que consume horas sin resultado. Característica: reconocerlo pronto y pivotar.</a:t>
+            </a:r>
+          </a:p>
+          <a:p>
+            <a:pPr>
+              <a:spcAft>
+                <a:spcPts val="600"/>
+              </a:spcAft>
+            </a:pPr>
+            <a:r>
+              <a:rPr sz="1500">
+                <a:solidFill>
+                  <a:srgbClr val="22282E"/>
+                </a:solidFill>
+              </a:rPr>
+              <a:t>•  Low-hanging fruit: vulnerabilidad fácil que da puntos rápidos. Característica: se caza con buena enumeración inicial.</a:t>
+            </a:r>
+          </a:p>
+          <a:p>
+            <a:pPr>
+              <a:spcAft>
+                <a:spcPts val="600"/>
+              </a:spcAft>
+            </a:pPr>
+            <a:r>
+              <a:rPr sz="1500">
+                <a:solidFill>
+                  <a:srgbClr val="22282E"/>
+                </a:solidFill>
+              </a:rPr>
+              <a:t>•  Foothold: primer acceso a la máquina (usuario sin privilegios). Característica: paso previo a la escalada.</a:t>
+            </a:r>
+          </a:p>
+          <a:p>
+            <a:pPr>
+              <a:spcAft>
+                <a:spcPts val="600"/>
+              </a:spcAft>
+            </a:pPr>
+            <a:r>
+              <a:rPr sz="1500">
+                <a:solidFill>
+                  <a:srgbClr val="22282E"/>
+                </a:solidFill>
+              </a:rPr>
+              <a:t>•  Privilege escalation: pasar de usuario a root/SYSTEM. Característica: se apoya en enumeración local (kernel, SUID, servicios, tokens).</a:t>
+            </a:r>
+          </a:p>
+          <a:p>
+            <a:pPr>
+              <a:spcAft>
+                <a:spcPts val="600"/>
+              </a:spcAft>
+            </a:pPr>
+            <a:r>
+              <a:rPr sz="1500">
+                <a:solidFill>
+                  <a:srgbClr val="22282E"/>
+                </a:solidFill>
+              </a:rPr>
+              <a:t>•  Proof.txt / local.txt: banderas que prueban el compromiso. Característica: son la evidencia puntuable del examen.</a:t>
             </a:r>
           </a:p>
         </p:txBody>
@@ -4778,7 +5124,7 @@
                   <a:srgbClr val="0B3D2E"/>
                 </a:solidFill>
               </a:rPr>
-              <a:t>📝 Reto verificable</a:t>
+              <a:t>🧰 Herramientas y preparación</a:t>
             </a:r>
           </a:p>
         </p:txBody>
@@ -4816,22 +5162,82 @@
                   <a:srgbClr val="22282E"/>
                 </a:solidFill>
               </a:rPr>
-              <a:t>•  Resuelve cinco máquinas de una plataforma autorizada (mezcla Linux/Windows, dificultad creciente) y entrega un cuaderno de notas con enumeración, foothold, escalada y capturas de banderas para cada una.</a:t>
-            </a:r>
-          </a:p>
-          <a:p>
-            <a:pPr>
-              <a:spcAft>
-                <a:spcPts val="600"/>
-              </a:spcAft>
-            </a:pPr>
-            <a:r>
-              <a:rPr sz="1500">
-                <a:solidFill>
-                  <a:srgbClr val="22282E"/>
-                </a:solidFill>
-              </a:rPr>
-              <a:t>•  Criterio de aceptación: las 5 máquinas tienen local.txt y proof.txt capturados, cada nota permite reconstruir el ataque sin volver a la máquina, y al menos una escalada es de Windows y otra de Linux.</a:t>
+              <a:t>•  Kali Linux actualizado (tu VM de la Clase 010 / equivalente).</a:t>
+            </a:r>
+          </a:p>
+          <a:p>
+            <a:pPr>
+              <a:spcAft>
+                <a:spcPts val="600"/>
+              </a:spcAft>
+            </a:pPr>
+            <a:r>
+              <a:rPr sz="1500">
+                <a:solidFill>
+                  <a:srgbClr val="22282E"/>
+                </a:solidFill>
+              </a:rPr>
+              <a:t>•  Enumeración: nmap, autorecon, ffuf/gobuster, enum4linux-ng, nikto.</a:t>
+            </a:r>
+          </a:p>
+          <a:p>
+            <a:pPr>
+              <a:spcAft>
+                <a:spcPts val="600"/>
+              </a:spcAft>
+            </a:pPr>
+            <a:r>
+              <a:rPr sz="1500">
+                <a:solidFill>
+                  <a:srgbClr val="22282E"/>
+                </a:solidFill>
+              </a:rPr>
+              <a:t>•  Escalada: linpeas.sh, winPEAS.exe, pspy, GTFOBins, LOLBAS.</a:t>
+            </a:r>
+          </a:p>
+          <a:p>
+            <a:pPr>
+              <a:spcAft>
+                <a:spcPts val="600"/>
+              </a:spcAft>
+            </a:pPr>
+            <a:r>
+              <a:rPr sz="1500">
+                <a:solidFill>
+                  <a:srgbClr val="22282E"/>
+                </a:solidFill>
+              </a:rPr>
+              <a:t>•  Notas: CherryTree u Obsidian con plantilla por máquina (puertos, servicios, creds, PoC, escalada).</a:t>
+            </a:r>
+          </a:p>
+          <a:p>
+            <a:pPr>
+              <a:spcAft>
+                <a:spcPts val="600"/>
+              </a:spcAft>
+            </a:pPr>
+            <a:r>
+              <a:rPr sz="1500">
+                <a:solidFill>
+                  <a:srgbClr val="22282E"/>
+                </a:solidFill>
+              </a:rPr>
+              <a:t>•  Plataformas de práctica autorizadas: HTB, Proving Grounds Play/Practice, TryHackMe.</a:t>
+            </a:r>
+          </a:p>
+          <a:p>
+            <a:pPr>
+              <a:spcAft>
+                <a:spcPts val="600"/>
+              </a:spcAft>
+            </a:pPr>
+            <a:r>
+              <a:rPr sz="1500">
+                <a:solidFill>
+                  <a:srgbClr val="22282E"/>
+                </a:solidFill>
+              </a:rPr>
+              <a:t>•  Plantilla de informe (la reutilizarás en la Clase 303).</a:t>
             </a:r>
           </a:p>
         </p:txBody>
